--- a/pitch/ARES_SIH2026_Idea_Presentation.pptx
+++ b/pitch/ARES_SIH2026_Idea_Presentation.pptx
@@ -5,7 +5,7 @@
     <p:sldMasterId id="2147483648" r:id="rId1"/>
   </p:sldMasterIdLst>
   <p:notesMasterIdLst>
-    <p:notesMasterId r:id="rId9"/>
+    <p:notesMasterId r:id="rId8"/>
   </p:notesMasterIdLst>
   <p:sldIdLst>
     <p:sldId id="291" r:id="rId2"/>
@@ -261,7 +261,7 @@
             <a:fld id="{C4D5ADD5-2BBC-4A94-8F86-D9013941F742}" type="datetimeFigureOut">
               <a:rPr lang="en-US"/>
               <a:pPr/>
-              <a:t>6/2/2026</a:t>
+              <a:t>9/18/26</a:t>
             </a:fld>
             <a:endParaRPr lang="en-US"/>
           </a:p>
@@ -598,60 +598,41 @@
       </p:grpSpPr>
       <p:sp>
         <p:nvSpPr>
-          <p:cNvPr id="16385" name="Slide Image Placeholder 1"/>
+          <p:cNvPr id="2" name="Slide Image Placeholder 1"/>
           <p:cNvSpPr>
             <a:spLocks noGrp="1" noRot="1" noChangeAspect="1"/>
           </p:cNvSpPr>
           <p:nvPr>
-            <p:ph type="sldImg"/>
+            <p:ph type="sldImg" idx="2"/>
           </p:nvPr>
         </p:nvSpPr>
-        <p:spPr bwMode="auto">
-          <a:xfrm>
-            <a:off x="381000" y="685800"/>
-            <a:ext cx="6096000" cy="3429000"/>
-          </a:xfrm>
-          <a:noFill/>
-          <a:ln>
-            <a:solidFill>
-              <a:srgbClr val="000000"/>
-            </a:solidFill>
-            <a:miter lim="800000"/>
-            <a:headEnd/>
-            <a:tailEnd/>
-          </a:ln>
-        </p:spPr>
-      </p:sp>
-      <p:sp>
-        <p:nvSpPr>
-          <p:cNvPr id="16386" name="Notes Placeholder 2"/>
+        <p:spPr/>
+      </p:sp>
+      <p:sp>
+        <p:nvSpPr>
+          <p:cNvPr id="3" name="Notes Placeholder 2"/>
           <p:cNvSpPr>
             <a:spLocks noGrp="1"/>
           </p:cNvSpPr>
           <p:nvPr>
-            <p:ph type="body" idx="1"/>
+            <p:ph type="body" sz="quarter" idx="3"/>
           </p:nvPr>
         </p:nvSpPr>
-        <p:spPr bwMode="auto">
-          <a:noFill/>
-        </p:spPr>
-        <p:txBody>
-          <a:bodyPr wrap="square" numCol="1" anchor="t" anchorCtr="0" compatLnSpc="1">
-            <a:prstTxWarp prst="textNoShape">
-              <a:avLst/>
-            </a:prstTxWarp>
-          </a:bodyPr>
-          <a:lstStyle/>
-          <a:p>
-            <a:r>
-              <a:t>Open with the problem in one line: after a disaster, drones fly a fixed grid and give every patch of ground equal time, including empty ground. Our drone reads the scene while flying and re-plans in the air. The three numbers at the bottom are all measured, not estimated: 20 of 20 survivors found against 11 for a grid, 3.2 times faster to reach half of them, and 100 percent of the model's layers running on the drone's own NPU chip. </a:t>
-            </a:r>
-          </a:p>
-        </p:txBody>
-      </p:sp>
-      <p:sp>
-        <p:nvSpPr>
-          <p:cNvPr id="16387" name="Slide Number Placeholder 3"/>
+        <p:spPr/>
+        <p:txBody>
+          <a:bodyPr/>
+          <a:lstStyle/>
+          <a:p>
+            <a:r>
+              <a:rPr dirty="0"/>
+              <a:t>Fill the six portal fields before exporting. Keep the SIH logo and title bar exactly as they are.</a:t>
+            </a:r>
+          </a:p>
+        </p:txBody>
+      </p:sp>
+      <p:sp>
+        <p:nvSpPr>
+          <p:cNvPr id="4" name="Slide Number Placeholder 3"/>
           <p:cNvSpPr>
             <a:spLocks noGrp="1"/>
           </p:cNvSpPr>
@@ -659,33 +640,9 @@
             <p:ph type="sldNum" sz="quarter" idx="5"/>
           </p:nvPr>
         </p:nvSpPr>
-        <p:spPr bwMode="auto">
-          <a:noFill/>
-          <a:ln>
-            <a:miter lim="800000"/>
-            <a:headEnd/>
-            <a:tailEnd/>
-          </a:ln>
-        </p:spPr>
-        <p:txBody>
-          <a:bodyPr/>
-          <a:lstStyle/>
-          <a:p>
-            <a:fld id="{65F62A7E-A2F8-438F-9CF8-47DE63F471B4}" type="slidenum">
-              <a:rPr lang="en-US"/>
-              <a:pPr/>
-              <a:t>2</a:t>
-            </a:fld>
-            <a:endParaRPr lang="en-US"/>
-          </a:p>
-        </p:txBody>
+        <p:spPr/>
       </p:sp>
     </p:spTree>
-    <p:extLst>
-      <p:ext uri="{BB962C8B-B14F-4D97-AF65-F5344CB8AC3E}">
-        <p14:creationId xmlns:p14="http://schemas.microsoft.com/office/powerpoint/2010/main" val="2904073229"/>
-      </p:ext>
-    </p:extLst>
   </p:cSld>
   <p:clrMapOvr>
     <a:masterClrMapping/>
@@ -712,7 +669,7 @@
       </p:grpSpPr>
       <p:sp>
         <p:nvSpPr>
-          <p:cNvPr id="18433" name="Slide Image Placeholder 1"/>
+          <p:cNvPr id="16385" name="Slide Image Placeholder 1"/>
           <p:cNvSpPr>
             <a:spLocks noGrp="1" noRot="1" noChangeAspect="1"/>
           </p:cNvSpPr>
@@ -738,7 +695,7 @@
       </p:sp>
       <p:sp>
         <p:nvSpPr>
-          <p:cNvPr id="18434" name="Notes Placeholder 2"/>
+          <p:cNvPr id="16386" name="Notes Placeholder 2"/>
           <p:cNvSpPr>
             <a:spLocks noGrp="1"/>
           </p:cNvSpPr>
@@ -758,14 +715,15 @@
           <a:lstStyle/>
           <a:p>
             <a:r>
-              <a:t>Walk the diagram left to right along the top: two cameras feed a fusion step, then tracking makes sure each person is counted once. Every box in the shaded band is on the aircraft - sensing, detection, tracking, localization, priority and the planner itself. The dark bar is the one data format all three of our sub-teams agreed on. Below it is the ground station, which also runs with no internet. The orange line is the important one - the decision loop closes on the drone, so it needs no link at all. What crosses the radio is a few hundred bytes of survivor records, not video. The dashboard receives results and sends no commands.</a:t>
-            </a:r>
-          </a:p>
-        </p:txBody>
-      </p:sp>
-      <p:sp>
-        <p:nvSpPr>
-          <p:cNvPr id="18435" name="Slide Number Placeholder 3"/>
+              <a:rPr dirty="0"/>
+              <a:t>Open with the problem in one line: after a disaster, drones fly a fixed grid and give every patch of ground equal time, including empty ground. Our drone reads the scene while flying and re-plans in the air. The three numbers at the bottom are all measured, not estimated: 20 of 20 survivors found against 11 for a grid, 3.2 times faster to reach half of them, and 100 percent of the model's layers running on the drone's own NPU chip. </a:t>
+            </a:r>
+          </a:p>
+        </p:txBody>
+      </p:sp>
+      <p:sp>
+        <p:nvSpPr>
+          <p:cNvPr id="16387" name="Slide Number Placeholder 3"/>
           <p:cNvSpPr>
             <a:spLocks noGrp="1"/>
           </p:cNvSpPr>
@@ -785,10 +743,10 @@
           <a:bodyPr/>
           <a:lstStyle/>
           <a:p>
-            <a:fld id="{0CA7B74D-3791-4AC6-8451-F10DBCCCDD9A}" type="slidenum">
+            <a:fld id="{65F62A7E-A2F8-438F-9CF8-47DE63F471B4}" type="slidenum">
               <a:rPr lang="en-US"/>
               <a:pPr/>
-              <a:t>3</a:t>
+              <a:t>2</a:t>
             </a:fld>
             <a:endParaRPr lang="en-US"/>
           </a:p>
@@ -797,7 +755,7 @@
     </p:spTree>
     <p:extLst>
       <p:ext uri="{BB962C8B-B14F-4D97-AF65-F5344CB8AC3E}">
-        <p14:creationId xmlns:p14="http://schemas.microsoft.com/office/powerpoint/2010/main" val="2335206292"/>
+        <p14:creationId xmlns:p14="http://schemas.microsoft.com/office/powerpoint/2010/main" val="2904073229"/>
       </p:ext>
     </p:extLst>
   </p:cSld>
@@ -872,6 +830,122 @@
           <a:lstStyle/>
           <a:p>
             <a:r>
+              <a:rPr dirty="0"/>
+              <a:t>Walk the diagram left to right along the top: two cameras feed a fusion step, then tracking makes sure each person is counted once. Every box in the shaded band is on the aircraft - sensing, detection, tracking, localization, priority and the planner itself. The dark bar is the one data format all three of our sub-teams agreed on. Below it is the ground station, which also runs with no internet. The orange line is the important one - the decision loop closes on the drone, so it needs no link at all. What crosses the radio is a few hundred bytes of survivor records, not video. The dashboard receives results and sends no commands.</a:t>
+            </a:r>
+          </a:p>
+        </p:txBody>
+      </p:sp>
+      <p:sp>
+        <p:nvSpPr>
+          <p:cNvPr id="18435" name="Slide Number Placeholder 3"/>
+          <p:cNvSpPr>
+            <a:spLocks noGrp="1"/>
+          </p:cNvSpPr>
+          <p:nvPr>
+            <p:ph type="sldNum" sz="quarter" idx="5"/>
+          </p:nvPr>
+        </p:nvSpPr>
+        <p:spPr bwMode="auto">
+          <a:noFill/>
+          <a:ln>
+            <a:miter lim="800000"/>
+            <a:headEnd/>
+            <a:tailEnd/>
+          </a:ln>
+        </p:spPr>
+        <p:txBody>
+          <a:bodyPr/>
+          <a:lstStyle/>
+          <a:p>
+            <a:fld id="{0CA7B74D-3791-4AC6-8451-F10DBCCCDD9A}" type="slidenum">
+              <a:rPr lang="en-US"/>
+              <a:pPr/>
+              <a:t>3</a:t>
+            </a:fld>
+            <a:endParaRPr lang="en-US"/>
+          </a:p>
+        </p:txBody>
+      </p:sp>
+    </p:spTree>
+    <p:extLst>
+      <p:ext uri="{BB962C8B-B14F-4D97-AF65-F5344CB8AC3E}">
+        <p14:creationId xmlns:p14="http://schemas.microsoft.com/office/powerpoint/2010/main" val="2335206292"/>
+      </p:ext>
+    </p:extLst>
+  </p:cSld>
+  <p:clrMapOvr>
+    <a:masterClrMapping/>
+  </p:clrMapOvr>
+</p:notes>
+</file>
+
+<file path=ppt/notesSlides/notesSlide4.xml><?xml version="1.0" encoding="utf-8"?>
+<p:notes xmlns:a="http://schemas.openxmlformats.org/drawingml/2006/main" xmlns:r="http://schemas.openxmlformats.org/officeDocument/2006/relationships" xmlns:p="http://schemas.openxmlformats.org/presentationml/2006/main">
+  <p:cSld>
+    <p:spTree>
+      <p:nvGrpSpPr>
+        <p:cNvPr id="1" name=""/>
+        <p:cNvGrpSpPr/>
+        <p:nvPr/>
+      </p:nvGrpSpPr>
+      <p:grpSpPr>
+        <a:xfrm>
+          <a:off x="0" y="0"/>
+          <a:ext cx="0" cy="0"/>
+          <a:chOff x="0" y="0"/>
+          <a:chExt cx="0" cy="0"/>
+        </a:xfrm>
+      </p:grpSpPr>
+      <p:sp>
+        <p:nvSpPr>
+          <p:cNvPr id="18433" name="Slide Image Placeholder 1"/>
+          <p:cNvSpPr>
+            <a:spLocks noGrp="1" noRot="1" noChangeAspect="1"/>
+          </p:cNvSpPr>
+          <p:nvPr>
+            <p:ph type="sldImg"/>
+          </p:nvPr>
+        </p:nvSpPr>
+        <p:spPr bwMode="auto">
+          <a:xfrm>
+            <a:off x="381000" y="685800"/>
+            <a:ext cx="6096000" cy="3429000"/>
+          </a:xfrm>
+          <a:noFill/>
+          <a:ln>
+            <a:solidFill>
+              <a:srgbClr val="000000"/>
+            </a:solidFill>
+            <a:miter lim="800000"/>
+            <a:headEnd/>
+            <a:tailEnd/>
+          </a:ln>
+        </p:spPr>
+      </p:sp>
+      <p:sp>
+        <p:nvSpPr>
+          <p:cNvPr id="18434" name="Notes Placeholder 2"/>
+          <p:cNvSpPr>
+            <a:spLocks noGrp="1"/>
+          </p:cNvSpPr>
+          <p:nvPr>
+            <p:ph type="body" idx="1"/>
+          </p:nvPr>
+        </p:nvSpPr>
+        <p:spPr bwMode="auto">
+          <a:noFill/>
+        </p:spPr>
+        <p:txBody>
+          <a:bodyPr wrap="square" numCol="1" anchor="t" anchorCtr="0" compatLnSpc="1">
+            <a:prstTxWarp prst="textNoShape">
+              <a:avLst/>
+            </a:prstTxWarp>
+          </a:bodyPr>
+          <a:lstStyle/>
+          <a:p>
+            <a:r>
+              <a:rPr dirty="0"/>
               <a:t>Left column is what already works and is measured. Right column is honest about risk. The orange box is what we are still measuring - leave those brackets in only if the numbers are genuinely not ready on submission day; otherwise replace them. The dark strip is our scope table. Judges reward teams that say clearly what is built, what is partial and what is only simulated.</a:t>
             </a:r>
           </a:p>
@@ -980,7 +1054,7 @@
 </p:notes>
 </file>
 
-<file path=ppt/notesSlides/notesSlide4.xml><?xml version="1.0" encoding="utf-8"?>
+<file path=ppt/notesSlides/notesSlide5.xml><?xml version="1.0" encoding="utf-8"?>
 <p:notes xmlns:a="http://schemas.openxmlformats.org/drawingml/2006/main" xmlns:r="http://schemas.openxmlformats.org/officeDocument/2006/relationships" xmlns:p="http://schemas.openxmlformats.org/presentationml/2006/main">
   <p:cSld>
     <p:spTree>
@@ -1045,6 +1119,7 @@
           <a:lstStyle/>
           <a:p>
             <a:r>
+              <a:rPr dirty="0"/>
               <a:t>The left chart is survivors found, the right is how long it took to reach half of them. Note the bottom row deliberately: with no useful prior information our method simply matches the grid - it never does worse. Showing that we tested the case where our own method has no advantage is what makes the other two rows believable.</a:t>
             </a:r>
           </a:p>
@@ -1153,7 +1228,7 @@
 </p:notes>
 </file>
 
-<file path=ppt/notesSlides/notesSlide5.xml><?xml version="1.0" encoding="utf-8"?>
+<file path=ppt/notesSlides/notesSlide6.xml><?xml version="1.0" encoding="utf-8"?>
 <p:notes xmlns:a="http://schemas.openxmlformats.org/drawingml/2006/main" xmlns:r="http://schemas.openxmlformats.org/officeDocument/2006/relationships" xmlns:p="http://schemas.openxmlformats.org/presentationml/2006/main">
   <p:cSld>
     <p:spTree>
@@ -1218,6 +1293,7 @@
           <a:lstStyle/>
           <a:p>
             <a:r>
+              <a:rPr dirty="0"/>
               <a:t>Everything here is a public dataset, an open tool or standard practice. Nothing is proprietary and nothing is bought. The dark strip explains how the numbers were produced, which is the question a technical screener asks first.</a:t>
             </a:r>
           </a:p>
@@ -1326,76 +1402,6 @@
 </p:notes>
 </file>
 
-<file path=ppt/notesSlides/notesSlide6.xml><?xml version="1.0" encoding="utf-8"?>
-<p:notes xmlns:a="http://schemas.openxmlformats.org/drawingml/2006/main" xmlns:p="http://schemas.openxmlformats.org/presentationml/2006/main" xmlns:r="http://schemas.openxmlformats.org/officeDocument/2006/relationships">
-  <p:cSld>
-    <p:spTree>
-      <p:nvGrpSpPr>
-        <p:cNvPr id="1" name=""/>
-        <p:cNvGrpSpPr/>
-        <p:nvPr/>
-      </p:nvGrpSpPr>
-      <p:grpSpPr>
-        <a:xfrm>
-          <a:off x="0" y="0"/>
-          <a:ext cx="0" cy="0"/>
-          <a:chOff x="0" y="0"/>
-          <a:chExt cx="0" cy="0"/>
-        </a:xfrm>
-      </p:grpSpPr>
-      <p:sp>
-        <p:nvSpPr>
-          <p:cNvPr id="2" name="Slide Image Placeholder 1"/>
-          <p:cNvSpPr>
-            <a:spLocks noGrp="1"/>
-          </p:cNvSpPr>
-          <p:nvPr>
-            <p:ph type="sldImg" idx="2"/>
-          </p:nvPr>
-        </p:nvSpPr>
-        <p:spPr/>
-      </p:sp>
-      <p:sp>
-        <p:nvSpPr>
-          <p:cNvPr id="3" name="Notes Placeholder 2"/>
-          <p:cNvSpPr>
-            <a:spLocks noGrp="1"/>
-          </p:cNvSpPr>
-          <p:nvPr>
-            <p:ph type="body" idx="3" sz="quarter"/>
-          </p:nvPr>
-        </p:nvSpPr>
-        <p:spPr/>
-        <p:txBody>
-          <a:bodyPr/>
-          <a:lstStyle/>
-          <a:p>
-            <a:r>
-              <a:t>Fill the six portal fields before exporting. Keep the SIH logo and title bar exactly as they are.</a:t>
-            </a:r>
-          </a:p>
-        </p:txBody>
-      </p:sp>
-      <p:sp>
-        <p:nvSpPr>
-          <p:cNvPr id="4" name="Slide Number Placeholder 3"/>
-          <p:cNvSpPr>
-            <a:spLocks noGrp="1"/>
-          </p:cNvSpPr>
-          <p:nvPr>
-            <p:ph type="sldNum" idx="5" sz="quarter"/>
-          </p:nvPr>
-        </p:nvSpPr>
-        <p:spPr/>
-      </p:sp>
-    </p:spTree>
-  </p:cSld>
-  <p:clrMapOvr>
-    <a:masterClrMapping/>
-  </p:clrMapOvr>
-</p:notes>
-</file>
-
 <file path=ppt/slideLayouts/slideLayout1.xml><?xml version="1.0" encoding="utf-8"?>
 <p:sldLayout xmlns:a="http://schemas.openxmlformats.org/drawingml/2006/main" xmlns:r="http://schemas.openxmlformats.org/officeDocument/2006/relationships" xmlns:p="http://schemas.openxmlformats.org/presentationml/2006/main" type="title" preserve="1">
   <p:cSld name="Title Slide">
@@ -1579,7 +1585,7 @@
           <a:p>
             <a:fld id="{E60792E3-D524-454C-8AFD-A91972900BCB}" type="datetime1">
               <a:rPr lang="en-US" smtClean="0"/>
-              <a:t>6/2/2026</a:t>
+              <a:t>9/18/26</a:t>
             </a:fld>
             <a:endParaRPr lang="en-US"/>
           </a:p>
@@ -1761,7 +1767,7 @@
           <a:p>
             <a:fld id="{053C3A68-6922-42D3-8905-ECC2D82A3469}" type="datetime1">
               <a:rPr lang="en-US" smtClean="0"/>
-              <a:t>6/2/2026</a:t>
+              <a:t>9/18/26</a:t>
             </a:fld>
             <a:endParaRPr lang="en-US"/>
           </a:p>
@@ -1953,7 +1959,7 @@
           <a:p>
             <a:fld id="{CB69E9F4-7604-4950-A8B2-8ACDEDB1506E}" type="datetime1">
               <a:rPr lang="en-US" smtClean="0"/>
-              <a:t>6/2/2026</a:t>
+              <a:t>9/18/26</a:t>
             </a:fld>
             <a:endParaRPr lang="en-US"/>
           </a:p>
@@ -2135,7 +2141,7 @@
           <a:p>
             <a:fld id="{708B7524-32A2-4C20-A58C-BC3BAA1042FC}" type="datetime1">
               <a:rPr lang="en-US" smtClean="0"/>
-              <a:t>6/2/2026</a:t>
+              <a:t>9/18/26</a:t>
             </a:fld>
             <a:endParaRPr lang="en-US"/>
           </a:p>
@@ -2394,7 +2400,7 @@
           <a:p>
             <a:fld id="{1E994447-D6B2-43BB-A877-57F1A267B999}" type="datetime1">
               <a:rPr lang="en-US" smtClean="0"/>
-              <a:t>6/2/2026</a:t>
+              <a:t>9/18/26</a:t>
             </a:fld>
             <a:endParaRPr lang="en-US"/>
           </a:p>
@@ -2693,7 +2699,7 @@
           <a:p>
             <a:fld id="{68920E16-BD35-483C-AA6B-346FC7E46DEA}" type="datetime1">
               <a:rPr lang="en-US" smtClean="0"/>
-              <a:t>6/2/2026</a:t>
+              <a:t>9/18/26</a:t>
             </a:fld>
             <a:endParaRPr lang="en-US"/>
           </a:p>
@@ -3126,7 +3132,7 @@
           <a:p>
             <a:fld id="{2FEAC6F8-5103-4FC0-A69E-5C6AE6469DA8}" type="datetime1">
               <a:rPr lang="en-US" smtClean="0"/>
-              <a:t>6/2/2026</a:t>
+              <a:t>9/18/26</a:t>
             </a:fld>
             <a:endParaRPr lang="en-US"/>
           </a:p>
@@ -3257,7 +3263,7 @@
           <a:p>
             <a:fld id="{C60C6921-0627-4C8F-83D5-0CF936D2FFDD}" type="datetime1">
               <a:rPr lang="en-US" smtClean="0"/>
-              <a:t>6/2/2026</a:t>
+              <a:t>9/18/26</a:t>
             </a:fld>
             <a:endParaRPr lang="en-US"/>
           </a:p>
@@ -3366,7 +3372,7 @@
           <a:p>
             <a:fld id="{2FF08AD7-8103-40F8-983C-E2BA6BB9CBE0}" type="datetime1">
               <a:rPr lang="en-US" smtClean="0"/>
-              <a:t>6/2/2026</a:t>
+              <a:t>9/18/26</a:t>
             </a:fld>
             <a:endParaRPr lang="en-US"/>
           </a:p>
@@ -3655,7 +3661,7 @@
           <a:p>
             <a:fld id="{DF8C06B4-9380-4A4D-AF49-A3596E17DAF5}" type="datetime1">
               <a:rPr lang="en-US" smtClean="0"/>
-              <a:t>6/2/2026</a:t>
+              <a:t>9/18/26</a:t>
             </a:fld>
             <a:endParaRPr lang="en-US"/>
           </a:p>
@@ -3924,7 +3930,7 @@
           <a:p>
             <a:fld id="{EF7FDEF1-C582-4E22-9E77-D68326471F28}" type="datetime1">
               <a:rPr lang="en-US" smtClean="0"/>
-              <a:t>6/2/2026</a:t>
+              <a:t>9/18/26</a:t>
             </a:fld>
             <a:endParaRPr lang="en-US"/>
           </a:p>
@@ -4167,7 +4173,7 @@
           <a:p>
             <a:fld id="{780A9602-A9A9-453F-AEF1-37B5837E02CD}" type="datetime1">
               <a:rPr lang="en-US" smtClean="0"/>
-              <a:t>6/2/2026</a:t>
+              <a:t>9/18/26</a:t>
             </a:fld>
             <a:endParaRPr lang="en-US"/>
           </a:p>
@@ -4718,7 +4724,7 @@
                 <a16:creationId xmlns:a16="http://schemas.microsoft.com/office/drawing/2014/main" id="{3E443FD7-A66B-4AA0-872D-B088B9BC5F17}"/>
               </a:ext>
               <a:ext uri="{C183D7F6-B498-43B3-948B-1728B52AA6E4}">
-                <adec:decorative xmlns:adec="http://schemas.microsoft.com/office/drawing/2017/decorative" xmlns="" val="1"/>
+                <adec:decorative xmlns:adec="http://schemas.microsoft.com/office/drawing/2017/decorative" val="1"/>
               </a:ext>
             </a:extLst>
           </p:cNvPr>
@@ -4778,7 +4784,7 @@
                 <a16:creationId xmlns:a16="http://schemas.microsoft.com/office/drawing/2014/main" id="{C04BE0EF-3561-49B4-9A29-F283168A91C7}"/>
               </a:ext>
               <a:ext uri="{C183D7F6-B498-43B3-948B-1728B52AA6E4}">
-                <adec:decorative xmlns:adec="http://schemas.microsoft.com/office/drawing/2017/decorative" xmlns="" val="1"/>
+                <adec:decorative xmlns:adec="http://schemas.microsoft.com/office/drawing/2017/decorative" val="1"/>
               </a:ext>
             </a:extLst>
           </p:cNvPr>
@@ -5559,7 +5565,7 @@
           <p:nvPr/>
         </p:nvPicPr>
         <p:blipFill rotWithShape="1">
-          <a:blip r:embed="rId2"/>
+          <a:blip r:embed="rId3"/>
           <a:srcRect r="59916"/>
           <a:stretch/>
         </p:blipFill>
@@ -5639,16 +5645,7 @@
                 </a:solidFill>
                 <a:latin typeface="Garamond" panose="02020404030301010803" pitchFamily="18" charset="0"/>
               </a:rPr>
-              <a:t>SMART INDIA HACKATHON </a:t>
-            </a:r>
-            <a:r>
-              <a:rPr lang="en-US" sz="3300" b="1" dirty="0" smtClean="0">
-                <a:solidFill>
-                  <a:schemeClr val="tx2"/>
-                </a:solidFill>
-                <a:latin typeface="Garamond" panose="02020404030301010803" pitchFamily="18" charset="0"/>
-              </a:rPr>
-              <a:t>2026</a:t>
+              <a:t>SMART INDIA HACKATHON 2026</a:t>
             </a:r>
             <a:endParaRPr lang="en-IN" sz="4000" b="1" dirty="0">
               <a:solidFill>
@@ -5668,7 +5665,7 @@
         <p:spPr>
           <a:xfrm>
             <a:off x="331286" y="2076450"/>
-            <a:ext cx="5924550" cy="4703019"/>
+            <a:ext cx="5924550" cy="3758593"/>
           </a:xfrm>
           <a:prstGeom prst="rect">
             <a:avLst/>
@@ -5689,15 +5686,52 @@
               <a:buChar char="•"/>
             </a:pPr>
             <a:r>
-              <a:rPr sz="1700" b="1">
+              <a:rPr sz="1700" b="1" dirty="0">
                 <a:solidFill>
                   <a:srgbClr val="12222A"/>
                 </a:solidFill>
                 <a:latin typeface="Calibri"/>
               </a:rPr>
-              <a:t>Problem Statement ID -   [ fill from SIH portal ]</a:t>
+              <a:t>Problem Statement ID -   </a:t>
+            </a:r>
+            <a:r>
+              <a:rPr lang="en-US" sz="1700" b="1" dirty="0">
+                <a:solidFill>
+                  <a:srgbClr val="12222A"/>
+                </a:solidFill>
+                <a:latin typeface="Calibri"/>
+              </a:rPr>
+              <a:t>26177</a:t>
             </a:r>
             <a:endParaRPr lang="en-US" dirty="0"/>
+          </a:p>
+          <a:p>
+            <a:pPr marL="285750" indent="-285750" algn="just">
+              <a:lnSpc>
+                <a:spcPct val="100000"/>
+              </a:lnSpc>
+              <a:buFont typeface="Arial" panose="020B0604020202020204" pitchFamily="34" charset="0"/>
+              <a:buChar char="•"/>
+            </a:pPr>
+            <a:r>
+              <a:rPr sz="1700" b="1" dirty="0">
+                <a:solidFill>
+                  <a:srgbClr val="12222A"/>
+                </a:solidFill>
+                <a:latin typeface="Calibri"/>
+              </a:rPr>
+              <a:t>Problem Statement Title -   </a:t>
+            </a:r>
+            <a:r>
+              <a:rPr lang="en-IN" dirty="0"/>
+              <a:t>A deployable AI-powered autonomous drone that aids search-and-rescue operations by detecting people and hazards, thereby improving responder safety and reducing victim discovery time.</a:t>
+            </a:r>
+            <a:endParaRPr sz="1700" b="1" dirty="0">
+              <a:solidFill>
+                <a:srgbClr val="12222A"/>
+              </a:solidFill>
+              <a:latin typeface="Calibri"/>
+            </a:endParaRPr>
           </a:p>
           <a:p>
             <a:pPr marL="285750" indent="-285750" algn="just">
@@ -5708,14 +5742,29 @@
               <a:buChar char="•"/>
             </a:pPr>
             <a:r>
-              <a:rPr sz="1700" b="1">
+              <a:rPr sz="1700" b="1" dirty="0">
                 <a:solidFill>
                   <a:srgbClr val="12222A"/>
                 </a:solidFill>
                 <a:latin typeface="Calibri"/>
               </a:rPr>
-              <a:t>Problem Statement Title -   [ paste the exact PS title ]</a:t>
-            </a:r>
+              <a:t>Theme -   </a:t>
+            </a:r>
+            <a:r>
+              <a:rPr lang="en-US" sz="1700" b="1" dirty="0">
+                <a:solidFill>
+                  <a:srgbClr val="12222A"/>
+                </a:solidFill>
+                <a:latin typeface="Calibri"/>
+              </a:rPr>
+              <a:t>Robotics and Drones</a:t>
+            </a:r>
+            <a:endParaRPr sz="1700" b="1" dirty="0">
+              <a:solidFill>
+                <a:srgbClr val="12222A"/>
+              </a:solidFill>
+              <a:latin typeface="Calibri"/>
+            </a:endParaRPr>
           </a:p>
           <a:p>
             <a:pPr marL="285750" indent="-285750" algn="just">
@@ -5726,13 +5775,13 @@
               <a:buChar char="•"/>
             </a:pPr>
             <a:r>
-              <a:rPr sz="1700" b="1">
+              <a:rPr sz="1700" b="1" dirty="0">
                 <a:solidFill>
                   <a:srgbClr val="12222A"/>
                 </a:solidFill>
                 <a:latin typeface="Calibri"/>
               </a:rPr>
-              <a:t>Theme -   [ e.g. Disaster Management ]</a:t>
+              <a:t>PS Category -   Hardware</a:t>
             </a:r>
           </a:p>
           <a:p>
@@ -5744,13 +5793,13 @@
               <a:buChar char="•"/>
             </a:pPr>
             <a:r>
-              <a:rPr sz="1700" b="1">
+              <a:rPr sz="1700" b="1" dirty="0">
                 <a:solidFill>
                   <a:srgbClr val="12222A"/>
                 </a:solidFill>
                 <a:latin typeface="Calibri"/>
               </a:rPr>
-              <a:t>PS Category -   Hardware</a:t>
+              <a:t>Team ID -  </a:t>
             </a:r>
           </a:p>
           <a:p>
@@ -5762,32 +5811,29 @@
               <a:buChar char="•"/>
             </a:pPr>
             <a:r>
-              <a:rPr sz="1700" b="1">
+              <a:rPr sz="1700" b="1" dirty="0">
                 <a:solidFill>
                   <a:srgbClr val="12222A"/>
                 </a:solidFill>
                 <a:latin typeface="Calibri"/>
               </a:rPr>
-              <a:t>Team ID -   [ fill from SIH portal ]</a:t>
-            </a:r>
-          </a:p>
-          <a:p>
-            <a:pPr marL="285750" indent="-285750" algn="just">
-              <a:lnSpc>
-                <a:spcPct val="200000"/>
-              </a:lnSpc>
-              <a:buFont typeface="Arial" panose="020B0604020202020204" pitchFamily="34" charset="0"/>
-              <a:buChar char="•"/>
-            </a:pPr>
-            <a:r>
-              <a:rPr sz="1700" b="1">
+              <a:t>Team Name -   </a:t>
+            </a:r>
+            <a:r>
+              <a:rPr lang="en-US" sz="1700" b="1" dirty="0">
                 <a:solidFill>
                   <a:srgbClr val="12222A"/>
                 </a:solidFill>
                 <a:latin typeface="Calibri"/>
               </a:rPr>
-              <a:t>Team Name -   [ as registered on portal ]</a:t>
-            </a:r>
+              <a:t>ARES</a:t>
+            </a:r>
+            <a:endParaRPr sz="1700" b="1" dirty="0">
+              <a:solidFill>
+                <a:srgbClr val="12222A"/>
+              </a:solidFill>
+              <a:latin typeface="Calibri"/>
+            </a:endParaRPr>
           </a:p>
         </p:txBody>
       </p:sp>
@@ -5800,7 +5846,7 @@
           <p:nvPr/>
         </p:nvPicPr>
         <p:blipFill>
-          <a:blip r:embed="rId3">
+          <a:blip r:embed="rId4">
             <a:extLst>
               <a:ext uri="{28A0092B-C50C-407E-A947-70E740481C1C}">
                 <a14:useLocalDpi xmlns:a14="http://schemas.microsoft.com/office/drawing/2010/main" val="0"/>
@@ -5821,48 +5867,6 @@
           </a:prstGeom>
         </p:spPr>
       </p:pic>
-      <p:sp>
-        <p:nvSpPr>
-          <p:cNvPr id="38" name="TextBox 37"/>
-          <p:cNvSpPr txBox="1"/>
-          <p:nvPr/>
-        </p:nvSpPr>
-        <p:spPr>
-          <a:xfrm>
-            <a:off x="384048" y="6053328"/>
-            <a:ext cx="6766560" cy="274320"/>
-          </a:xfrm>
-          <a:prstGeom prst="rect">
-            <a:avLst/>
-          </a:prstGeom>
-          <a:noFill/>
-        </p:spPr>
-        <p:txBody>
-          <a:bodyPr wrap="square" anchor="t" lIns="0" rIns="0" tIns="0" bIns="0">
-            <a:spAutoFit/>
-          </a:bodyPr>
-          <a:lstStyle/>
-          <a:p>
-            <a:pPr algn="l">
-              <a:spcBef>
-                <a:spcPts val="0"/>
-              </a:spcBef>
-              <a:spcAft>
-                <a:spcPts val="300"/>
-              </a:spcAft>
-            </a:pPr>
-            <a:r>
-              <a:rPr sz="1100" b="1">
-                <a:solidFill>
-                  <a:srgbClr val="0E6E7E"/>
-                </a:solidFill>
-                <a:latin typeface="Calibri"/>
-              </a:rPr>
-              <a:t>3-minute demo video:   [ paste the public link here before exporting to PDF ]</a:t>
-            </a:r>
-          </a:p>
-        </p:txBody>
-      </p:sp>
     </p:spTree>
   </p:cSld>
   <p:clrMapOvr>
@@ -5890,64 +5894,6 @@
       </p:grpSpPr>
       <p:sp>
         <p:nvSpPr>
-          <p:cNvPr id="9" name="Rectangle 8"/>
-          <p:cNvSpPr>
-            <a:spLocks noChangeArrowheads="1"/>
-          </p:cNvSpPr>
-          <p:nvPr/>
-        </p:nvSpPr>
-        <p:spPr bwMode="auto">
-          <a:xfrm>
-            <a:off x="0" y="6354762"/>
-            <a:ext cx="12191999" cy="503238"/>
-          </a:xfrm>
-          <a:prstGeom prst="rect">
-            <a:avLst/>
-          </a:prstGeom>
-          <a:solidFill>
-            <a:srgbClr val="0070C0"/>
-          </a:solidFill>
-          <a:ln w="9525">
-            <a:noFill/>
-            <a:miter lim="800000"/>
-            <a:headEnd/>
-            <a:tailEnd/>
-          </a:ln>
-          <a:effectLst>
-            <a:outerShdw dist="23000" dir="5400000" rotWithShape="0">
-              <a:srgbClr val="808080">
-                <a:alpha val="34999"/>
-              </a:srgbClr>
-            </a:outerShdw>
-          </a:effectLst>
-        </p:spPr>
-        <p:txBody>
-          <a:bodyPr anchor="ctr"/>
-          <a:lstStyle/>
-          <a:p>
-            <a:pPr algn="ctr" fontAlgn="auto">
-              <a:spcBef>
-                <a:spcPts val="0"/>
-              </a:spcBef>
-              <a:spcAft>
-                <a:spcPts val="0"/>
-              </a:spcAft>
-              <a:defRPr/>
-            </a:pPr>
-            <a:endParaRPr lang="en-US" dirty="0">
-              <a:solidFill>
-                <a:schemeClr val="accent2">
-                  <a:lumMod val="75000"/>
-                </a:schemeClr>
-              </a:solidFill>
-              <a:latin typeface="+mn-lt"/>
-              <a:ea typeface="+mn-ea"/>
-            </a:endParaRPr>
-          </a:p>
-        </p:txBody>
-      </p:sp>
-      <p:sp>
-        <p:nvSpPr>
           <p:cNvPr id="15361" name="Title 1"/>
           <p:cNvSpPr>
             <a:spLocks noGrp="1"/>
@@ -5985,6 +5931,11 @@
                 <a:cs typeface="Times New Roman" panose="02020603050405020304" pitchFamily="18" charset="0"/>
               </a:rPr>
             </a:br>
+            <a:endParaRPr lang="en-US" sz="3600" b="1" dirty="0">
+              <a:latin typeface="Times New Roman" panose="02020603050405020304" pitchFamily="18" charset="0"/>
+              <a:ea typeface="ＭＳ Ｐゴシック" pitchFamily="1" charset="-128"/>
+              <a:cs typeface="Times New Roman" panose="02020603050405020304" pitchFamily="18" charset="0"/>
+            </a:endParaRPr>
           </a:p>
         </p:txBody>
       </p:sp>
@@ -6067,7 +6018,7 @@
                 <a16:creationId xmlns:a16="http://schemas.microsoft.com/office/drawing/2014/main" id="{5DBCE864-823D-4A13-9607-5DA1F0ED5FB8}"/>
               </a:ext>
               <a:ext uri="{C183D7F6-B498-43B3-948B-1728B52AA6E4}">
-                <adec:decorative xmlns:adec="http://schemas.microsoft.com/office/drawing/2017/decorative" xmlns="" val="0"/>
+                <adec:decorative xmlns:adec="http://schemas.microsoft.com/office/drawing/2017/decorative" val="0"/>
               </a:ext>
             </a:extLst>
           </p:cNvPr>
@@ -6076,12 +6027,18 @@
         </p:nvSpPr>
         <p:spPr>
           <a:xfrm>
-            <a:off x="329773" y="252246"/>
+            <a:off x="329184" y="198506"/>
             <a:ext cx="1251857" cy="807334"/>
           </a:xfrm>
           <a:prstGeom prst="ellipse">
             <a:avLst/>
           </a:prstGeom>
+          <a:blipFill>
+            <a:blip r:embed="rId3"/>
+            <a:stretch>
+              <a:fillRect/>
+            </a:stretch>
+          </a:blipFill>
         </p:spPr>
         <p:style>
           <a:lnRef idx="2">
@@ -6119,7 +6076,7 @@
           <p:nvPr/>
         </p:nvPicPr>
         <p:blipFill>
-          <a:blip r:embed="rId3">
+          <a:blip r:embed="rId4">
             <a:extLst>
               <a:ext uri="{28A0092B-C50C-407E-A947-70E740481C1C}">
                 <a14:useLocalDpi xmlns:a14="http://schemas.microsoft.com/office/drawing/2010/main" val="0"/>
@@ -6183,6 +6140,7 @@
           <a:lstStyle/>
           <a:p>
             <a:pPr algn="ctr"/>
+            <a:endParaRPr/>
           </a:p>
         </p:txBody>
       </p:sp>
@@ -6203,7 +6161,7 @@
           <a:noFill/>
         </p:spPr>
         <p:txBody>
-          <a:bodyPr wrap="square" anchor="t" lIns="0" rIns="0" tIns="0" bIns="0">
+          <a:bodyPr wrap="square" lIns="0" tIns="0" rIns="0" bIns="0" anchor="t">
             <a:spAutoFit/>
           </a:bodyPr>
           <a:lstStyle/>
@@ -6245,7 +6203,7 @@
           <a:noFill/>
         </p:spPr>
         <p:txBody>
-          <a:bodyPr wrap="square" anchor="t" lIns="0" rIns="0" tIns="0" bIns="0">
+          <a:bodyPr wrap="square" lIns="0" tIns="0" rIns="0" bIns="0" anchor="t">
             <a:spAutoFit/>
           </a:bodyPr>
           <a:lstStyle/>
@@ -6332,6 +6290,7 @@
           <a:lstStyle/>
           <a:p>
             <a:pPr algn="ctr"/>
+            <a:endParaRPr/>
           </a:p>
         </p:txBody>
       </p:sp>
@@ -6352,7 +6311,7 @@
           <a:noFill/>
         </p:spPr>
         <p:txBody>
-          <a:bodyPr wrap="square" anchor="t" lIns="0" rIns="0" tIns="0" bIns="0">
+          <a:bodyPr wrap="square" lIns="0" tIns="0" rIns="0" bIns="0" anchor="t">
             <a:spAutoFit/>
           </a:bodyPr>
           <a:lstStyle/>
@@ -6394,7 +6353,7 @@
           <a:noFill/>
         </p:spPr>
         <p:txBody>
-          <a:bodyPr wrap="square" anchor="t" lIns="0" rIns="0" tIns="0" bIns="0">
+          <a:bodyPr wrap="square" lIns="0" tIns="0" rIns="0" bIns="0" anchor="t">
             <a:spAutoFit/>
           </a:bodyPr>
           <a:lstStyle/>
@@ -6481,6 +6440,7 @@
           <a:lstStyle/>
           <a:p>
             <a:pPr algn="ctr"/>
+            <a:endParaRPr/>
           </a:p>
         </p:txBody>
       </p:sp>
@@ -6501,7 +6461,7 @@
           <a:noFill/>
         </p:spPr>
         <p:txBody>
-          <a:bodyPr wrap="square" anchor="t" lIns="0" rIns="0" tIns="0" bIns="0">
+          <a:bodyPr wrap="square" lIns="0" tIns="0" rIns="0" bIns="0" anchor="t">
             <a:spAutoFit/>
           </a:bodyPr>
           <a:lstStyle/>
@@ -6543,7 +6503,7 @@
           <a:noFill/>
         </p:spPr>
         <p:txBody>
-          <a:bodyPr wrap="square" anchor="t" lIns="0" rIns="0" tIns="0" bIns="0">
+          <a:bodyPr wrap="square" lIns="0" tIns="0" rIns="0" bIns="0" anchor="t">
             <a:spAutoFit/>
           </a:bodyPr>
           <a:lstStyle/>
@@ -6596,7 +6556,7 @@
           <p:nvPr/>
         </p:nvPicPr>
         <p:blipFill>
-          <a:blip r:embed="rId4"/>
+          <a:blip r:embed="rId5"/>
           <a:stretch>
             <a:fillRect/>
           </a:stretch>
@@ -6654,6 +6614,7 @@
           <a:lstStyle/>
           <a:p>
             <a:pPr algn="ctr"/>
+            <a:endParaRPr/>
           </a:p>
         </p:txBody>
       </p:sp>
@@ -6674,7 +6635,7 @@
           <a:noFill/>
         </p:spPr>
         <p:txBody>
-          <a:bodyPr wrap="square" anchor="ctr" lIns="0" rIns="0" tIns="0" bIns="0">
+          <a:bodyPr wrap="square" lIns="0" tIns="0" rIns="0" bIns="0" anchor="ctr">
             <a:spAutoFit/>
           </a:bodyPr>
           <a:lstStyle/>
@@ -6716,7 +6677,7 @@
           <a:noFill/>
         </p:spPr>
         <p:txBody>
-          <a:bodyPr wrap="square" anchor="ctr" lIns="0" rIns="0" tIns="0" bIns="0">
+          <a:bodyPr wrap="square" lIns="0" tIns="0" rIns="0" bIns="0" anchor="ctr">
             <a:spAutoFit/>
           </a:bodyPr>
           <a:lstStyle/>
@@ -6784,6 +6745,7 @@
           <a:lstStyle/>
           <a:p>
             <a:pPr algn="ctr"/>
+            <a:endParaRPr/>
           </a:p>
         </p:txBody>
       </p:sp>
@@ -6804,7 +6766,7 @@
           <a:noFill/>
         </p:spPr>
         <p:txBody>
-          <a:bodyPr wrap="square" anchor="ctr" lIns="0" rIns="0" tIns="0" bIns="0">
+          <a:bodyPr wrap="square" lIns="0" tIns="0" rIns="0" bIns="0" anchor="ctr">
             <a:spAutoFit/>
           </a:bodyPr>
           <a:lstStyle/>
@@ -6846,7 +6808,7 @@
           <a:noFill/>
         </p:spPr>
         <p:txBody>
-          <a:bodyPr wrap="square" anchor="ctr" lIns="0" rIns="0" tIns="0" bIns="0">
+          <a:bodyPr wrap="square" lIns="0" tIns="0" rIns="0" bIns="0" anchor="ctr">
             <a:spAutoFit/>
           </a:bodyPr>
           <a:lstStyle/>
@@ -6914,6 +6876,7 @@
           <a:lstStyle/>
           <a:p>
             <a:pPr algn="ctr"/>
+            <a:endParaRPr/>
           </a:p>
         </p:txBody>
       </p:sp>
@@ -6934,7 +6897,7 @@
           <a:noFill/>
         </p:spPr>
         <p:txBody>
-          <a:bodyPr wrap="square" anchor="ctr" lIns="0" rIns="0" tIns="0" bIns="0">
+          <a:bodyPr wrap="square" lIns="0" tIns="0" rIns="0" bIns="0" anchor="ctr">
             <a:spAutoFit/>
           </a:bodyPr>
           <a:lstStyle/>
@@ -6976,7 +6939,7 @@
           <a:noFill/>
         </p:spPr>
         <p:txBody>
-          <a:bodyPr wrap="square" anchor="ctr" lIns="0" rIns="0" tIns="0" bIns="0">
+          <a:bodyPr wrap="square" lIns="0" tIns="0" rIns="0" bIns="0" anchor="ctr">
             <a:spAutoFit/>
           </a:bodyPr>
           <a:lstStyle/>
@@ -7028,70 +6991,6 @@
       </p:grpSpPr>
       <p:sp>
         <p:nvSpPr>
-          <p:cNvPr id="10" name="Rectangle 9">
-            <a:extLst>
-              <a:ext uri="{FF2B5EF4-FFF2-40B4-BE49-F238E27FC236}">
-                <a16:creationId xmlns:a16="http://schemas.microsoft.com/office/drawing/2014/main" id="{AD4F69D3-EEB0-4C4C-9434-B9960FB5854C}"/>
-              </a:ext>
-            </a:extLst>
-          </p:cNvPr>
-          <p:cNvSpPr>
-            <a:spLocks noChangeArrowheads="1"/>
-          </p:cNvSpPr>
-          <p:nvPr/>
-        </p:nvSpPr>
-        <p:spPr bwMode="auto">
-          <a:xfrm>
-            <a:off x="0" y="6354762"/>
-            <a:ext cx="12191999" cy="503238"/>
-          </a:xfrm>
-          <a:prstGeom prst="rect">
-            <a:avLst/>
-          </a:prstGeom>
-          <a:solidFill>
-            <a:srgbClr val="0070C0"/>
-          </a:solidFill>
-          <a:ln w="9525">
-            <a:noFill/>
-            <a:miter lim="800000"/>
-            <a:headEnd/>
-            <a:tailEnd/>
-          </a:ln>
-          <a:effectLst>
-            <a:outerShdw dist="23000" dir="5400000" rotWithShape="0">
-              <a:srgbClr val="808080">
-                <a:alpha val="34999"/>
-              </a:srgbClr>
-            </a:outerShdw>
-          </a:effectLst>
-        </p:spPr>
-        <p:txBody>
-          <a:bodyPr anchor="ctr"/>
-          <a:lstStyle/>
-          <a:p>
-            <a:pPr algn="ctr" fontAlgn="auto">
-              <a:spcBef>
-                <a:spcPts val="0"/>
-              </a:spcBef>
-              <a:spcAft>
-                <a:spcPts val="0"/>
-              </a:spcAft>
-              <a:defRPr/>
-            </a:pPr>
-            <a:endParaRPr lang="en-US" dirty="0">
-              <a:solidFill>
-                <a:schemeClr val="accent2">
-                  <a:lumMod val="75000"/>
-                </a:schemeClr>
-              </a:solidFill>
-              <a:latin typeface="+mn-lt"/>
-              <a:ea typeface="+mn-ea"/>
-            </a:endParaRPr>
-          </a:p>
-        </p:txBody>
-      </p:sp>
-      <p:sp>
-        <p:nvSpPr>
           <p:cNvPr id="17409" name="Title 1"/>
           <p:cNvSpPr>
             <a:spLocks noGrp="1"/>
@@ -7199,7 +7098,7 @@
                 <a16:creationId xmlns:a16="http://schemas.microsoft.com/office/drawing/2014/main" id="{5DBCE864-823D-4A13-9607-5DA1F0ED5FB8}"/>
               </a:ext>
               <a:ext uri="{C183D7F6-B498-43B3-948B-1728B52AA6E4}">
-                <adec:decorative xmlns:adec="http://schemas.microsoft.com/office/drawing/2017/decorative" xmlns="" val="0"/>
+                <adec:decorative xmlns:adec="http://schemas.microsoft.com/office/drawing/2017/decorative" val="0"/>
               </a:ext>
             </a:extLst>
           </p:cNvPr>
@@ -7214,6 +7113,12 @@
           <a:prstGeom prst="ellipse">
             <a:avLst/>
           </a:prstGeom>
+          <a:blipFill>
+            <a:blip r:embed="rId3"/>
+            <a:stretch>
+              <a:fillRect/>
+            </a:stretch>
+          </a:blipFill>
         </p:spPr>
         <p:style>
           <a:lnRef idx="2">
@@ -7234,10 +7139,6 @@
           <a:lstStyle/>
           <a:p>
             <a:pPr algn="ctr"/>
-            <a:r>
-              <a:rPr lang="en-US" dirty="0"/>
-              <a:t>Your Team Name</a:t>
-            </a:r>
             <a:endParaRPr lang="en-IN" dirty="0"/>
           </a:p>
         </p:txBody>
@@ -7251,7 +7152,7 @@
           <p:nvPr/>
         </p:nvPicPr>
         <p:blipFill>
-          <a:blip r:embed="rId3">
+          <a:blip r:embed="rId4">
             <a:extLst>
               <a:ext uri="{28A0092B-C50C-407E-A947-70E740481C1C}">
                 <a14:useLocalDpi xmlns:a14="http://schemas.microsoft.com/office/drawing/2010/main" val="0"/>
@@ -7289,7 +7190,7 @@
           <a:noFill/>
         </p:spPr>
         <p:txBody>
-          <a:bodyPr wrap="square" anchor="t" lIns="0" rIns="0" tIns="0" bIns="0">
+          <a:bodyPr wrap="square" lIns="0" tIns="0" rIns="0" bIns="0" anchor="t">
             <a:spAutoFit/>
           </a:bodyPr>
           <a:lstStyle/>
@@ -7317,72 +7218,6 @@
       <p:pic>
         <p:nvPicPr>
           <p:cNvPr id="17411" name="Picture 17410" descr="d2_pipeline.png"/>
-          <p:cNvPicPr>
-            <a:picLocks noChangeAspect="1"/>
-          </p:cNvPicPr>
-          <p:nvPr/>
-        </p:nvPicPr>
-        <p:blipFill>
-          <a:blip r:embed="rId4"/>
-          <a:stretch>
-            <a:fillRect/>
-          </a:stretch>
-        </p:blipFill>
-        <p:spPr>
-          <a:xfrm>
-            <a:off x="329184" y="1481328"/>
-            <a:ext cx="7242048" cy="3031815"/>
-          </a:xfrm>
-          <a:prstGeom prst="rect">
-            <a:avLst/>
-          </a:prstGeom>
-        </p:spPr>
-      </p:pic>
-      <p:sp>
-        <p:nvSpPr>
-          <p:cNvPr id="17412" name="TextBox 17411"/>
-          <p:cNvSpPr txBox="1"/>
-          <p:nvPr/>
-        </p:nvSpPr>
-        <p:spPr>
-          <a:xfrm>
-            <a:off x="7882127" y="1481328"/>
-            <a:ext cx="3986784" cy="237744"/>
-          </a:xfrm>
-          <a:prstGeom prst="rect">
-            <a:avLst/>
-          </a:prstGeom>
-          <a:noFill/>
-        </p:spPr>
-        <p:txBody>
-          <a:bodyPr wrap="square" anchor="t" lIns="0" rIns="0" tIns="0" bIns="0">
-            <a:spAutoFit/>
-          </a:bodyPr>
-          <a:lstStyle/>
-          <a:p>
-            <a:pPr algn="l">
-              <a:spcBef>
-                <a:spcPts val="0"/>
-              </a:spcBef>
-              <a:spcAft>
-                <a:spcPts val="300"/>
-              </a:spcAft>
-            </a:pPr>
-            <a:r>
-              <a:rPr sz="900" b="1">
-                <a:solidFill>
-                  <a:srgbClr val="0E6E7E"/>
-                </a:solidFill>
-                <a:latin typeface="Calibri"/>
-              </a:rPr>
-              <a:t>THE COMMAND DASHBOARD — RUNNING, NOT A MOCKUP</a:t>
-            </a:r>
-          </a:p>
-        </p:txBody>
-      </p:sp>
-      <p:pic>
-        <p:nvPicPr>
-          <p:cNvPr id="17413" name="Picture 17412" descr="dashboard.png"/>
           <p:cNvPicPr>
             <a:picLocks noChangeAspect="1"/>
           </p:cNvPicPr>
@@ -7396,8 +7231,8 @@
         </p:blipFill>
         <p:spPr>
           <a:xfrm>
-            <a:off x="7882127" y="1755648"/>
-            <a:ext cx="3986784" cy="2242566"/>
+            <a:off x="329184" y="1481328"/>
+            <a:ext cx="7242048" cy="3031815"/>
           </a:xfrm>
           <a:prstGeom prst="rect">
             <a:avLst/>
@@ -7406,14 +7241,14 @@
       </p:pic>
       <p:sp>
         <p:nvSpPr>
-          <p:cNvPr id="17414" name="TextBox 17413"/>
+          <p:cNvPr id="17412" name="TextBox 17411"/>
           <p:cNvSpPr txBox="1"/>
           <p:nvPr/>
         </p:nvSpPr>
         <p:spPr>
           <a:xfrm>
-            <a:off x="7882127" y="4059936"/>
-            <a:ext cx="3986784" cy="658368"/>
+            <a:off x="7882127" y="1481328"/>
+            <a:ext cx="3986784" cy="237744"/>
           </a:xfrm>
           <a:prstGeom prst="rect">
             <a:avLst/>
@@ -7421,7 +7256,73 @@
           <a:noFill/>
         </p:spPr>
         <p:txBody>
-          <a:bodyPr wrap="square" anchor="t" lIns="0" rIns="0" tIns="0" bIns="0">
+          <a:bodyPr wrap="square" lIns="0" tIns="0" rIns="0" bIns="0" anchor="t">
+            <a:spAutoFit/>
+          </a:bodyPr>
+          <a:lstStyle/>
+          <a:p>
+            <a:pPr algn="l">
+              <a:spcBef>
+                <a:spcPts val="0"/>
+              </a:spcBef>
+              <a:spcAft>
+                <a:spcPts val="300"/>
+              </a:spcAft>
+            </a:pPr>
+            <a:r>
+              <a:rPr sz="900" b="1">
+                <a:solidFill>
+                  <a:srgbClr val="0E6E7E"/>
+                </a:solidFill>
+                <a:latin typeface="Calibri"/>
+              </a:rPr>
+              <a:t>THE COMMAND DASHBOARD — RUNNING, NOT A MOCKUP</a:t>
+            </a:r>
+          </a:p>
+        </p:txBody>
+      </p:sp>
+      <p:pic>
+        <p:nvPicPr>
+          <p:cNvPr id="17413" name="Picture 17412" descr="dashboard.png"/>
+          <p:cNvPicPr>
+            <a:picLocks noChangeAspect="1"/>
+          </p:cNvPicPr>
+          <p:nvPr/>
+        </p:nvPicPr>
+        <p:blipFill>
+          <a:blip r:embed="rId6"/>
+          <a:stretch>
+            <a:fillRect/>
+          </a:stretch>
+        </p:blipFill>
+        <p:spPr>
+          <a:xfrm>
+            <a:off x="7882127" y="1755648"/>
+            <a:ext cx="3986784" cy="2242566"/>
+          </a:xfrm>
+          <a:prstGeom prst="rect">
+            <a:avLst/>
+          </a:prstGeom>
+        </p:spPr>
+      </p:pic>
+      <p:sp>
+        <p:nvSpPr>
+          <p:cNvPr id="17414" name="TextBox 17413"/>
+          <p:cNvSpPr txBox="1"/>
+          <p:nvPr/>
+        </p:nvSpPr>
+        <p:spPr>
+          <a:xfrm>
+            <a:off x="7882127" y="4059936"/>
+            <a:ext cx="3986784" cy="658368"/>
+          </a:xfrm>
+          <a:prstGeom prst="rect">
+            <a:avLst/>
+          </a:prstGeom>
+          <a:noFill/>
+        </p:spPr>
+        <p:txBody>
+          <a:bodyPr wrap="square" lIns="0" tIns="0" rIns="0" bIns="0" anchor="t">
             <a:spAutoFit/>
           </a:bodyPr>
           <a:lstStyle/>
@@ -7508,6 +7409,7 @@
           <a:lstStyle/>
           <a:p>
             <a:pPr algn="ctr"/>
+            <a:endParaRPr/>
           </a:p>
         </p:txBody>
       </p:sp>
@@ -7528,7 +7430,7 @@
           <a:noFill/>
         </p:spPr>
         <p:txBody>
-          <a:bodyPr wrap="square" anchor="ctr" lIns="0" rIns="0" tIns="0" bIns="0">
+          <a:bodyPr wrap="square" lIns="0" tIns="0" rIns="0" bIns="0" anchor="ctr">
             <a:spAutoFit/>
           </a:bodyPr>
           <a:lstStyle/>
@@ -7597,85 +7499,6 @@
           <a:chExt cx="0" cy="0"/>
         </a:xfrm>
       </p:grpSpPr>
-      <p:sp>
-        <p:nvSpPr>
-          <p:cNvPr id="10" name="Rectangle 9">
-            <a:extLst>
-              <a:ext uri="{FF2B5EF4-FFF2-40B4-BE49-F238E27FC236}">
-                <a16:creationId xmlns:a16="http://schemas.microsoft.com/office/drawing/2014/main" id="{AD4F69D3-EEB0-4C4C-9434-B9960FB5854C}"/>
-              </a:ext>
-            </a:extLst>
-          </p:cNvPr>
-          <p:cNvSpPr>
-            <a:spLocks noChangeArrowheads="1"/>
-          </p:cNvSpPr>
-          <p:nvPr/>
-        </p:nvSpPr>
-        <p:spPr bwMode="auto">
-          <a:xfrm>
-            <a:off x="0" y="6354762"/>
-            <a:ext cx="12191999" cy="503238"/>
-          </a:xfrm>
-          <a:prstGeom prst="rect">
-            <a:avLst/>
-          </a:prstGeom>
-          <a:solidFill>
-            <a:srgbClr val="0070C0"/>
-          </a:solidFill>
-          <a:ln w="9525">
-            <a:noFill/>
-            <a:miter lim="800000"/>
-            <a:headEnd/>
-            <a:tailEnd/>
-          </a:ln>
-          <a:effectLst>
-            <a:outerShdw dist="23000" dir="5400000" rotWithShape="0">
-              <a:srgbClr val="808080">
-                <a:alpha val="34999"/>
-              </a:srgbClr>
-            </a:outerShdw>
-          </a:effectLst>
-        </p:spPr>
-        <p:txBody>
-          <a:bodyPr anchor="ctr"/>
-          <a:lstStyle/>
-          <a:p>
-            <a:pPr marL="0" marR="0" lvl="0" indent="0" algn="ctr" defTabSz="457200" rtl="0" eaLnBrk="1" fontAlgn="auto" latinLnBrk="0" hangingPunct="1">
-              <a:lnSpc>
-                <a:spcPct val="100000"/>
-              </a:lnSpc>
-              <a:spcBef>
-                <a:spcPts val="0"/>
-              </a:spcBef>
-              <a:spcAft>
-                <a:spcPts val="0"/>
-              </a:spcAft>
-              <a:buClrTx/>
-              <a:buSzTx/>
-              <a:buFontTx/>
-              <a:buNone/>
-              <a:tabLst/>
-              <a:defRPr/>
-            </a:pPr>
-            <a:endParaRPr kumimoji="0" lang="en-US" sz="1800" b="0" i="0" u="none" strike="noStrike" kern="1200" cap="none" spc="0" normalizeH="0" baseline="0" noProof="0" dirty="0">
-              <a:ln>
-                <a:noFill/>
-              </a:ln>
-              <a:solidFill>
-                <a:srgbClr val="C0504D">
-                  <a:lumMod val="75000"/>
-                </a:srgbClr>
-              </a:solidFill>
-              <a:effectLst/>
-              <a:uLnTx/>
-              <a:uFillTx/>
-              <a:latin typeface="Calibri"/>
-              <a:ea typeface="ＭＳ Ｐゴシック" pitchFamily="1" charset="-128"/>
-              <a:cs typeface="+mn-cs"/>
-            </a:endParaRPr>
-          </a:p>
-        </p:txBody>
-      </p:sp>
       <p:sp>
         <p:nvSpPr>
           <p:cNvPr id="17409" name="Title 1"/>
@@ -7868,7 +7691,7 @@
                 <a16:creationId xmlns:a16="http://schemas.microsoft.com/office/drawing/2014/main" id="{5DBCE864-823D-4A13-9607-5DA1F0ED5FB8}"/>
               </a:ext>
               <a:ext uri="{C183D7F6-B498-43B3-948B-1728B52AA6E4}">
-                <adec:decorative xmlns:adec="http://schemas.microsoft.com/office/drawing/2017/decorative" xmlns="" val="0"/>
+                <adec:decorative xmlns:adec="http://schemas.microsoft.com/office/drawing/2017/decorative" val="0"/>
               </a:ext>
             </a:extLst>
           </p:cNvPr>
@@ -7883,6 +7706,12 @@
           <a:prstGeom prst="ellipse">
             <a:avLst/>
           </a:prstGeom>
+          <a:blipFill>
+            <a:blip r:embed="rId3"/>
+            <a:stretch>
+              <a:fillRect/>
+            </a:stretch>
+          </a:blipFill>
         </p:spPr>
         <p:style>
           <a:lnRef idx="2">
@@ -7903,10 +7732,6 @@
           <a:lstStyle/>
           <a:p>
             <a:pPr algn="ctr"/>
-            <a:r>
-              <a:rPr lang="en-US" dirty="0"/>
-              <a:t>Your Team Name</a:t>
-            </a:r>
             <a:endParaRPr lang="en-IN" dirty="0"/>
           </a:p>
         </p:txBody>
@@ -7920,7 +7745,7 @@
           <p:nvPr/>
         </p:nvPicPr>
         <p:blipFill>
-          <a:blip r:embed="rId3">
+          <a:blip r:embed="rId4">
             <a:extLst>
               <a:ext uri="{28A0092B-C50C-407E-A947-70E740481C1C}">
                 <a14:useLocalDpi xmlns:a14="http://schemas.microsoft.com/office/drawing/2010/main" val="0"/>
@@ -7984,6 +7809,7 @@
           <a:lstStyle/>
           <a:p>
             <a:pPr algn="ctr"/>
+            <a:endParaRPr/>
           </a:p>
         </p:txBody>
       </p:sp>
@@ -8004,7 +7830,7 @@
           <a:noFill/>
         </p:spPr>
         <p:txBody>
-          <a:bodyPr wrap="square" anchor="t" lIns="0" rIns="0" tIns="0" bIns="0">
+          <a:bodyPr wrap="square" lIns="0" tIns="0" rIns="0" bIns="0" anchor="t">
             <a:spAutoFit/>
           </a:bodyPr>
           <a:lstStyle/>
@@ -8070,6 +7896,7 @@
           <a:lstStyle/>
           <a:p>
             <a:pPr algn="ctr"/>
+            <a:endParaRPr/>
           </a:p>
         </p:txBody>
       </p:sp>
@@ -8090,7 +7917,7 @@
           <a:noFill/>
         </p:spPr>
         <p:txBody>
-          <a:bodyPr wrap="square" anchor="t" lIns="0" rIns="0" tIns="0" bIns="0">
+          <a:bodyPr wrap="square" lIns="0" tIns="0" rIns="0" bIns="0" anchor="t">
             <a:spAutoFit/>
           </a:bodyPr>
           <a:lstStyle/>
@@ -8175,6 +8002,7 @@
           <a:lstStyle/>
           <a:p>
             <a:pPr algn="ctr"/>
+            <a:endParaRPr/>
           </a:p>
         </p:txBody>
       </p:sp>
@@ -8195,7 +8023,7 @@
           <a:noFill/>
         </p:spPr>
         <p:txBody>
-          <a:bodyPr wrap="square" anchor="t" lIns="0" rIns="0" tIns="0" bIns="0">
+          <a:bodyPr wrap="square" lIns="0" tIns="0" rIns="0" bIns="0" anchor="t">
             <a:spAutoFit/>
           </a:bodyPr>
           <a:lstStyle/>
@@ -8280,6 +8108,7 @@
           <a:lstStyle/>
           <a:p>
             <a:pPr algn="ctr"/>
+            <a:endParaRPr/>
           </a:p>
         </p:txBody>
       </p:sp>
@@ -8300,7 +8129,7 @@
           <a:noFill/>
         </p:spPr>
         <p:txBody>
-          <a:bodyPr wrap="square" anchor="t" lIns="0" rIns="0" tIns="0" bIns="0">
+          <a:bodyPr wrap="square" lIns="0" tIns="0" rIns="0" bIns="0" anchor="t">
             <a:spAutoFit/>
           </a:bodyPr>
           <a:lstStyle/>
@@ -8385,6 +8214,7 @@
           <a:lstStyle/>
           <a:p>
             <a:pPr algn="ctr"/>
+            <a:endParaRPr/>
           </a:p>
         </p:txBody>
       </p:sp>
@@ -8405,7 +8235,7 @@
           <a:noFill/>
         </p:spPr>
         <p:txBody>
-          <a:bodyPr wrap="square" anchor="t" lIns="0" rIns="0" tIns="0" bIns="0">
+          <a:bodyPr wrap="square" lIns="0" tIns="0" rIns="0" bIns="0" anchor="t">
             <a:spAutoFit/>
           </a:bodyPr>
           <a:lstStyle/>
@@ -8490,6 +8320,7 @@
           <a:lstStyle/>
           <a:p>
             <a:pPr algn="ctr"/>
+            <a:endParaRPr/>
           </a:p>
         </p:txBody>
       </p:sp>
@@ -8510,7 +8341,7 @@
           <a:noFill/>
         </p:spPr>
         <p:txBody>
-          <a:bodyPr wrap="square" anchor="t" lIns="0" rIns="0" tIns="0" bIns="0">
+          <a:bodyPr wrap="square" lIns="0" tIns="0" rIns="0" bIns="0" anchor="t">
             <a:spAutoFit/>
           </a:bodyPr>
           <a:lstStyle/>
@@ -8595,6 +8426,7 @@
           <a:lstStyle/>
           <a:p>
             <a:pPr algn="ctr"/>
+            <a:endParaRPr/>
           </a:p>
         </p:txBody>
       </p:sp>
@@ -8615,7 +8447,7 @@
           <a:noFill/>
         </p:spPr>
         <p:txBody>
-          <a:bodyPr wrap="square" anchor="t" lIns="0" rIns="0" tIns="0" bIns="0">
+          <a:bodyPr wrap="square" lIns="0" tIns="0" rIns="0" bIns="0" anchor="t">
             <a:spAutoFit/>
           </a:bodyPr>
           <a:lstStyle/>
@@ -8704,6 +8536,7 @@
           <a:lstStyle/>
           <a:p>
             <a:pPr algn="ctr"/>
+            <a:endParaRPr/>
           </a:p>
         </p:txBody>
       </p:sp>
@@ -8724,7 +8557,7 @@
           <a:noFill/>
         </p:spPr>
         <p:txBody>
-          <a:bodyPr wrap="square" anchor="t" lIns="0" rIns="0" tIns="0" bIns="0">
+          <a:bodyPr wrap="square" lIns="0" tIns="0" rIns="0" bIns="0" anchor="t">
             <a:spAutoFit/>
           </a:bodyPr>
           <a:lstStyle/>
@@ -8766,7 +8599,7 @@
           <a:noFill/>
         </p:spPr>
         <p:txBody>
-          <a:bodyPr wrap="square" anchor="t" lIns="0" rIns="0" tIns="0" bIns="0">
+          <a:bodyPr wrap="square" lIns="0" tIns="0" rIns="0" bIns="0" anchor="t">
             <a:spAutoFit/>
           </a:bodyPr>
           <a:lstStyle/>
@@ -8808,7 +8641,7 @@
           <a:noFill/>
         </p:spPr>
         <p:txBody>
-          <a:bodyPr wrap="square" anchor="t" lIns="0" rIns="0" tIns="0" bIns="0">
+          <a:bodyPr wrap="square" lIns="0" tIns="0" rIns="0" bIns="0" anchor="t">
             <a:spAutoFit/>
           </a:bodyPr>
           <a:lstStyle/>
@@ -8850,7 +8683,7 @@
           <a:noFill/>
         </p:spPr>
         <p:txBody>
-          <a:bodyPr wrap="square" anchor="t" lIns="0" rIns="0" tIns="0" bIns="0">
+          <a:bodyPr wrap="square" lIns="0" tIns="0" rIns="0" bIns="0" anchor="t">
             <a:spAutoFit/>
           </a:bodyPr>
           <a:lstStyle/>
@@ -8892,7 +8725,7 @@
           <a:noFill/>
         </p:spPr>
         <p:txBody>
-          <a:bodyPr wrap="square" anchor="t" lIns="0" rIns="0" tIns="0" bIns="0">
+          <a:bodyPr wrap="square" lIns="0" tIns="0" rIns="0" bIns="0" anchor="t">
             <a:spAutoFit/>
           </a:bodyPr>
           <a:lstStyle/>
@@ -8962,6 +8795,7 @@
           <a:lstStyle/>
           <a:p>
             <a:pPr algn="ctr"/>
+            <a:endParaRPr/>
           </a:p>
         </p:txBody>
       </p:sp>
@@ -8982,7 +8816,7 @@
           <a:noFill/>
         </p:spPr>
         <p:txBody>
-          <a:bodyPr wrap="square" anchor="t" lIns="0" rIns="0" tIns="0" bIns="0">
+          <a:bodyPr wrap="square" lIns="0" tIns="0" rIns="0" bIns="0" anchor="t">
             <a:spAutoFit/>
           </a:bodyPr>
           <a:lstStyle/>
@@ -8996,7 +8830,7 @@
               </a:spcAft>
             </a:pPr>
             <a:r>
-              <a:rPr sz="1200" b="1">
+              <a:rPr sz="1200" b="1" dirty="0">
                 <a:solidFill>
                   <a:srgbClr val="E07B39"/>
                 </a:solidFill>
@@ -9024,7 +8858,7 @@
           <a:noFill/>
         </p:spPr>
         <p:txBody>
-          <a:bodyPr wrap="square" anchor="t" lIns="0" rIns="0" tIns="0" bIns="0">
+          <a:bodyPr wrap="square" lIns="0" tIns="0" rIns="0" bIns="0" anchor="t">
             <a:spAutoFit/>
           </a:bodyPr>
           <a:lstStyle/>
@@ -9130,6 +8964,7 @@
           <a:lstStyle/>
           <a:p>
             <a:pPr algn="ctr"/>
+            <a:endParaRPr/>
           </a:p>
         </p:txBody>
       </p:sp>
@@ -9150,7 +8985,7 @@
           <a:noFill/>
         </p:spPr>
         <p:txBody>
-          <a:bodyPr wrap="square" anchor="t" lIns="0" rIns="0" tIns="0" bIns="0">
+          <a:bodyPr wrap="square" lIns="0" tIns="0" rIns="0" bIns="0" anchor="t">
             <a:spAutoFit/>
           </a:bodyPr>
           <a:lstStyle/>
@@ -9192,7 +9027,7 @@
           <a:noFill/>
         </p:spPr>
         <p:txBody>
-          <a:bodyPr wrap="square" anchor="t" lIns="0" rIns="0" tIns="0" bIns="0">
+          <a:bodyPr wrap="square" lIns="0" tIns="0" rIns="0" bIns="0" anchor="t">
             <a:spAutoFit/>
           </a:bodyPr>
           <a:lstStyle/>
@@ -9234,7 +9069,7 @@
           <a:noFill/>
         </p:spPr>
         <p:txBody>
-          <a:bodyPr wrap="square" anchor="t" lIns="0" rIns="0" tIns="0" bIns="0">
+          <a:bodyPr wrap="square" lIns="0" tIns="0" rIns="0" bIns="0" anchor="t">
             <a:spAutoFit/>
           </a:bodyPr>
           <a:lstStyle/>
@@ -9276,7 +9111,7 @@
           <a:noFill/>
         </p:spPr>
         <p:txBody>
-          <a:bodyPr wrap="square" anchor="t" lIns="0" rIns="0" tIns="0" bIns="0">
+          <a:bodyPr wrap="square" lIns="0" tIns="0" rIns="0" bIns="0" anchor="t">
             <a:spAutoFit/>
           </a:bodyPr>
           <a:lstStyle/>
@@ -9318,7 +9153,7 @@
           <a:noFill/>
         </p:spPr>
         <p:txBody>
-          <a:bodyPr wrap="square" anchor="t" lIns="0" rIns="0" tIns="0" bIns="0">
+          <a:bodyPr wrap="square" lIns="0" tIns="0" rIns="0" bIns="0" anchor="t">
             <a:spAutoFit/>
           </a:bodyPr>
           <a:lstStyle/>
@@ -9360,7 +9195,7 @@
           <a:noFill/>
         </p:spPr>
         <p:txBody>
-          <a:bodyPr wrap="square" anchor="t" lIns="0" rIns="0" tIns="0" bIns="0">
+          <a:bodyPr wrap="square" lIns="0" tIns="0" rIns="0" bIns="0" anchor="t">
             <a:spAutoFit/>
           </a:bodyPr>
           <a:lstStyle/>
@@ -9402,7 +9237,7 @@
           <a:noFill/>
         </p:spPr>
         <p:txBody>
-          <a:bodyPr wrap="square" anchor="t" lIns="0" rIns="0" tIns="0" bIns="0">
+          <a:bodyPr wrap="square" lIns="0" tIns="0" rIns="0" bIns="0" anchor="t">
             <a:spAutoFit/>
           </a:bodyPr>
           <a:lstStyle/>
@@ -9444,7 +9279,7 @@
           <a:noFill/>
         </p:spPr>
         <p:txBody>
-          <a:bodyPr wrap="square" anchor="t" lIns="0" rIns="0" tIns="0" bIns="0">
+          <a:bodyPr wrap="square" lIns="0" tIns="0" rIns="0" bIns="0" anchor="t">
             <a:spAutoFit/>
           </a:bodyPr>
           <a:lstStyle/>
@@ -9499,85 +9334,6 @@
           <a:chExt cx="0" cy="0"/>
         </a:xfrm>
       </p:grpSpPr>
-      <p:sp>
-        <p:nvSpPr>
-          <p:cNvPr id="10" name="Rectangle 9">
-            <a:extLst>
-              <a:ext uri="{FF2B5EF4-FFF2-40B4-BE49-F238E27FC236}">
-                <a16:creationId xmlns:a16="http://schemas.microsoft.com/office/drawing/2014/main" id="{AD4F69D3-EEB0-4C4C-9434-B9960FB5854C}"/>
-              </a:ext>
-            </a:extLst>
-          </p:cNvPr>
-          <p:cNvSpPr>
-            <a:spLocks noChangeArrowheads="1"/>
-          </p:cNvSpPr>
-          <p:nvPr/>
-        </p:nvSpPr>
-        <p:spPr bwMode="auto">
-          <a:xfrm>
-            <a:off x="0" y="6354762"/>
-            <a:ext cx="12191999" cy="503238"/>
-          </a:xfrm>
-          <a:prstGeom prst="rect">
-            <a:avLst/>
-          </a:prstGeom>
-          <a:solidFill>
-            <a:srgbClr val="0070C0"/>
-          </a:solidFill>
-          <a:ln w="9525">
-            <a:noFill/>
-            <a:miter lim="800000"/>
-            <a:headEnd/>
-            <a:tailEnd/>
-          </a:ln>
-          <a:effectLst>
-            <a:outerShdw dist="23000" dir="5400000" rotWithShape="0">
-              <a:srgbClr val="808080">
-                <a:alpha val="34999"/>
-              </a:srgbClr>
-            </a:outerShdw>
-          </a:effectLst>
-        </p:spPr>
-        <p:txBody>
-          <a:bodyPr anchor="ctr"/>
-          <a:lstStyle/>
-          <a:p>
-            <a:pPr marL="0" marR="0" lvl="0" indent="0" algn="ctr" defTabSz="457200" rtl="0" eaLnBrk="1" fontAlgn="auto" latinLnBrk="0" hangingPunct="1">
-              <a:lnSpc>
-                <a:spcPct val="100000"/>
-              </a:lnSpc>
-              <a:spcBef>
-                <a:spcPts val="0"/>
-              </a:spcBef>
-              <a:spcAft>
-                <a:spcPts val="0"/>
-              </a:spcAft>
-              <a:buClrTx/>
-              <a:buSzTx/>
-              <a:buFontTx/>
-              <a:buNone/>
-              <a:tabLst/>
-              <a:defRPr/>
-            </a:pPr>
-            <a:endParaRPr kumimoji="0" lang="en-US" sz="1800" b="0" i="0" u="none" strike="noStrike" kern="1200" cap="none" spc="0" normalizeH="0" baseline="0" noProof="0" dirty="0">
-              <a:ln>
-                <a:noFill/>
-              </a:ln>
-              <a:solidFill>
-                <a:srgbClr val="C0504D">
-                  <a:lumMod val="75000"/>
-                </a:srgbClr>
-              </a:solidFill>
-              <a:effectLst/>
-              <a:uLnTx/>
-              <a:uFillTx/>
-              <a:latin typeface="Calibri"/>
-              <a:ea typeface="ＭＳ Ｐゴシック" pitchFamily="1" charset="-128"/>
-              <a:cs typeface="+mn-cs"/>
-            </a:endParaRPr>
-          </a:p>
-        </p:txBody>
-      </p:sp>
       <p:sp>
         <p:nvSpPr>
           <p:cNvPr id="17409" name="Title 1"/>
@@ -9770,7 +9526,7 @@
                 <a16:creationId xmlns:a16="http://schemas.microsoft.com/office/drawing/2014/main" id="{5DBCE864-823D-4A13-9607-5DA1F0ED5FB8}"/>
               </a:ext>
               <a:ext uri="{C183D7F6-B498-43B3-948B-1728B52AA6E4}">
-                <adec:decorative xmlns:adec="http://schemas.microsoft.com/office/drawing/2017/decorative" xmlns="" val="0"/>
+                <adec:decorative xmlns:adec="http://schemas.microsoft.com/office/drawing/2017/decorative" val="0"/>
               </a:ext>
             </a:extLst>
           </p:cNvPr>
@@ -9785,6 +9541,12 @@
           <a:prstGeom prst="ellipse">
             <a:avLst/>
           </a:prstGeom>
+          <a:blipFill>
+            <a:blip r:embed="rId3"/>
+            <a:stretch>
+              <a:fillRect/>
+            </a:stretch>
+          </a:blipFill>
         </p:spPr>
         <p:style>
           <a:lnRef idx="2">
@@ -9805,10 +9567,6 @@
           <a:lstStyle/>
           <a:p>
             <a:pPr algn="ctr"/>
-            <a:r>
-              <a:rPr lang="en-US" dirty="0"/>
-              <a:t>Your Team Name</a:t>
-            </a:r>
             <a:endParaRPr lang="en-IN" dirty="0"/>
           </a:p>
         </p:txBody>
@@ -9822,7 +9580,7 @@
           <p:nvPr/>
         </p:nvPicPr>
         <p:blipFill>
-          <a:blip r:embed="rId3">
+          <a:blip r:embed="rId4">
             <a:extLst>
               <a:ext uri="{28A0092B-C50C-407E-A947-70E740481C1C}">
                 <a14:useLocalDpi xmlns:a14="http://schemas.microsoft.com/office/drawing/2010/main" val="0"/>
@@ -9852,7 +9610,7 @@
           <p:nvPr/>
         </p:nvPicPr>
         <p:blipFill>
-          <a:blip r:embed="rId4"/>
+          <a:blip r:embed="rId5"/>
           <a:stretch>
             <a:fillRect/>
           </a:stretch>
@@ -9884,7 +9642,7 @@
           <a:noFill/>
         </p:spPr>
         <p:txBody>
-          <a:bodyPr wrap="square" anchor="t" lIns="0" rIns="0" tIns="0" bIns="0">
+          <a:bodyPr wrap="square" lIns="0" tIns="0" rIns="0" bIns="0" anchor="t">
             <a:spAutoFit/>
           </a:bodyPr>
           <a:lstStyle/>
@@ -9952,6 +9710,7 @@
           <a:lstStyle/>
           <a:p>
             <a:pPr algn="ctr"/>
+            <a:endParaRPr/>
           </a:p>
         </p:txBody>
       </p:sp>
@@ -9972,7 +9731,7 @@
           <a:noFill/>
         </p:spPr>
         <p:txBody>
-          <a:bodyPr wrap="square" anchor="t" lIns="0" rIns="0" tIns="0" bIns="0">
+          <a:bodyPr wrap="square" lIns="0" tIns="0" rIns="0" bIns="0" anchor="t">
             <a:spAutoFit/>
           </a:bodyPr>
           <a:lstStyle/>
@@ -10014,7 +9773,7 @@
           <a:noFill/>
         </p:spPr>
         <p:txBody>
-          <a:bodyPr wrap="square" anchor="t" lIns="0" rIns="0" tIns="0" bIns="0">
+          <a:bodyPr wrap="square" lIns="0" tIns="0" rIns="0" bIns="0" anchor="t">
             <a:spAutoFit/>
           </a:bodyPr>
           <a:lstStyle/>
@@ -10056,7 +9815,7 @@
           <a:noFill/>
         </p:spPr>
         <p:txBody>
-          <a:bodyPr wrap="square" anchor="t" lIns="0" rIns="0" tIns="0" bIns="0">
+          <a:bodyPr wrap="square" lIns="0" tIns="0" rIns="0" bIns="0" anchor="t">
             <a:spAutoFit/>
           </a:bodyPr>
           <a:lstStyle/>
@@ -10098,7 +9857,7 @@
           <a:noFill/>
         </p:spPr>
         <p:txBody>
-          <a:bodyPr wrap="square" anchor="t" lIns="0" rIns="0" tIns="0" bIns="0">
+          <a:bodyPr wrap="square" lIns="0" tIns="0" rIns="0" bIns="0" anchor="t">
             <a:spAutoFit/>
           </a:bodyPr>
           <a:lstStyle/>
@@ -10159,7 +9918,7 @@
           <a:noFill/>
         </p:spPr>
         <p:txBody>
-          <a:bodyPr wrap="square" anchor="t" lIns="0" rIns="0" tIns="0" bIns="0">
+          <a:bodyPr wrap="square" lIns="0" tIns="0" rIns="0" bIns="0" anchor="t">
             <a:spAutoFit/>
           </a:bodyPr>
           <a:lstStyle/>
@@ -10220,7 +9979,7 @@
           <a:noFill/>
         </p:spPr>
         <p:txBody>
-          <a:bodyPr wrap="square" anchor="t" lIns="0" rIns="0" tIns="0" bIns="0">
+          <a:bodyPr wrap="square" lIns="0" tIns="0" rIns="0" bIns="0" anchor="t">
             <a:spAutoFit/>
           </a:bodyPr>
           <a:lstStyle/>
@@ -10288,6 +10047,7 @@
           <a:lstStyle/>
           <a:p>
             <a:pPr algn="ctr"/>
+            <a:endParaRPr/>
           </a:p>
         </p:txBody>
       </p:sp>
@@ -10308,7 +10068,7 @@
           <a:noFill/>
         </p:spPr>
         <p:txBody>
-          <a:bodyPr wrap="square" anchor="t" lIns="0" rIns="0" tIns="0" bIns="0">
+          <a:bodyPr wrap="square" lIns="0" tIns="0" rIns="0" bIns="0" anchor="t">
             <a:spAutoFit/>
           </a:bodyPr>
           <a:lstStyle/>
@@ -10350,7 +10110,7 @@
           <a:noFill/>
         </p:spPr>
         <p:txBody>
-          <a:bodyPr wrap="square" anchor="t" lIns="0" rIns="0" tIns="0" bIns="0">
+          <a:bodyPr wrap="square" lIns="0" tIns="0" rIns="0" bIns="0" anchor="t">
             <a:spAutoFit/>
           </a:bodyPr>
           <a:lstStyle/>
@@ -10462,85 +10222,6 @@
           <a:chExt cx="0" cy="0"/>
         </a:xfrm>
       </p:grpSpPr>
-      <p:sp>
-        <p:nvSpPr>
-          <p:cNvPr id="10" name="Rectangle 9">
-            <a:extLst>
-              <a:ext uri="{FF2B5EF4-FFF2-40B4-BE49-F238E27FC236}">
-                <a16:creationId xmlns:a16="http://schemas.microsoft.com/office/drawing/2014/main" id="{AD4F69D3-EEB0-4C4C-9434-B9960FB5854C}"/>
-              </a:ext>
-            </a:extLst>
-          </p:cNvPr>
-          <p:cNvSpPr>
-            <a:spLocks noChangeArrowheads="1"/>
-          </p:cNvSpPr>
-          <p:nvPr/>
-        </p:nvSpPr>
-        <p:spPr bwMode="auto">
-          <a:xfrm>
-            <a:off x="0" y="6354762"/>
-            <a:ext cx="12191999" cy="503238"/>
-          </a:xfrm>
-          <a:prstGeom prst="rect">
-            <a:avLst/>
-          </a:prstGeom>
-          <a:solidFill>
-            <a:srgbClr val="0070C0"/>
-          </a:solidFill>
-          <a:ln w="9525">
-            <a:noFill/>
-            <a:miter lim="800000"/>
-            <a:headEnd/>
-            <a:tailEnd/>
-          </a:ln>
-          <a:effectLst>
-            <a:outerShdw dist="23000" dir="5400000" rotWithShape="0">
-              <a:srgbClr val="808080">
-                <a:alpha val="34999"/>
-              </a:srgbClr>
-            </a:outerShdw>
-          </a:effectLst>
-        </p:spPr>
-        <p:txBody>
-          <a:bodyPr anchor="ctr"/>
-          <a:lstStyle/>
-          <a:p>
-            <a:pPr marL="0" marR="0" lvl="0" indent="0" algn="ctr" defTabSz="457200" rtl="0" eaLnBrk="1" fontAlgn="auto" latinLnBrk="0" hangingPunct="1">
-              <a:lnSpc>
-                <a:spcPct val="100000"/>
-              </a:lnSpc>
-              <a:spcBef>
-                <a:spcPts val="0"/>
-              </a:spcBef>
-              <a:spcAft>
-                <a:spcPts val="0"/>
-              </a:spcAft>
-              <a:buClrTx/>
-              <a:buSzTx/>
-              <a:buFontTx/>
-              <a:buNone/>
-              <a:tabLst/>
-              <a:defRPr/>
-            </a:pPr>
-            <a:endParaRPr kumimoji="0" lang="en-US" sz="1800" b="0" i="0" u="none" strike="noStrike" kern="1200" cap="none" spc="0" normalizeH="0" baseline="0" noProof="0" dirty="0">
-              <a:ln>
-                <a:noFill/>
-              </a:ln>
-              <a:solidFill>
-                <a:srgbClr val="C0504D">
-                  <a:lumMod val="75000"/>
-                </a:srgbClr>
-              </a:solidFill>
-              <a:effectLst/>
-              <a:uLnTx/>
-              <a:uFillTx/>
-              <a:latin typeface="Calibri"/>
-              <a:ea typeface="ＭＳ Ｐゴシック" pitchFamily="1" charset="-128"/>
-              <a:cs typeface="+mn-cs"/>
-            </a:endParaRPr>
-          </a:p>
-        </p:txBody>
-      </p:sp>
       <p:sp>
         <p:nvSpPr>
           <p:cNvPr id="17409" name="Title 1"/>
@@ -10733,7 +10414,7 @@
                 <a16:creationId xmlns:a16="http://schemas.microsoft.com/office/drawing/2014/main" id="{5DBCE864-823D-4A13-9607-5DA1F0ED5FB8}"/>
               </a:ext>
               <a:ext uri="{C183D7F6-B498-43B3-948B-1728B52AA6E4}">
-                <adec:decorative xmlns:adec="http://schemas.microsoft.com/office/drawing/2017/decorative" xmlns="" val="0"/>
+                <adec:decorative xmlns:adec="http://schemas.microsoft.com/office/drawing/2017/decorative" val="0"/>
               </a:ext>
             </a:extLst>
           </p:cNvPr>
@@ -10748,6 +10429,12 @@
           <a:prstGeom prst="ellipse">
             <a:avLst/>
           </a:prstGeom>
+          <a:blipFill>
+            <a:blip r:embed="rId3"/>
+            <a:stretch>
+              <a:fillRect/>
+            </a:stretch>
+          </a:blipFill>
         </p:spPr>
         <p:style>
           <a:lnRef idx="2">
@@ -10768,10 +10455,6 @@
           <a:lstStyle/>
           <a:p>
             <a:pPr algn="ctr"/>
-            <a:r>
-              <a:rPr lang="en-US" dirty="0"/>
-              <a:t>Your Team Name</a:t>
-            </a:r>
             <a:endParaRPr lang="en-IN" dirty="0"/>
           </a:p>
         </p:txBody>
@@ -10785,7 +10468,7 @@
           <p:nvPr/>
         </p:nvPicPr>
         <p:blipFill>
-          <a:blip r:embed="rId3">
+          <a:blip r:embed="rId4">
             <a:extLst>
               <a:ext uri="{28A0092B-C50C-407E-A947-70E740481C1C}">
                 <a14:useLocalDpi xmlns:a14="http://schemas.microsoft.com/office/drawing/2010/main" val="0"/>
@@ -10849,6 +10532,7 @@
           <a:lstStyle/>
           <a:p>
             <a:pPr algn="ctr"/>
+            <a:endParaRPr/>
           </a:p>
         </p:txBody>
       </p:sp>
@@ -10869,7 +10553,7 @@
           <a:noFill/>
         </p:spPr>
         <p:txBody>
-          <a:bodyPr wrap="square" anchor="t" lIns="0" rIns="0" tIns="0" bIns="0">
+          <a:bodyPr wrap="square" lIns="0" tIns="0" rIns="0" bIns="0" anchor="t">
             <a:spAutoFit/>
           </a:bodyPr>
           <a:lstStyle/>
@@ -10911,7 +10595,7 @@
           <a:noFill/>
         </p:spPr>
         <p:txBody>
-          <a:bodyPr wrap="square" anchor="t" lIns="0" rIns="0" tIns="0" bIns="0">
+          <a:bodyPr wrap="square" lIns="0" tIns="0" rIns="0" bIns="0" anchor="t">
             <a:spAutoFit/>
           </a:bodyPr>
           <a:lstStyle/>
@@ -11112,6 +10796,7 @@
           <a:lstStyle/>
           <a:p>
             <a:pPr algn="ctr"/>
+            <a:endParaRPr/>
           </a:p>
         </p:txBody>
       </p:sp>
@@ -11132,7 +10817,7 @@
           <a:noFill/>
         </p:spPr>
         <p:txBody>
-          <a:bodyPr wrap="square" anchor="t" lIns="0" rIns="0" tIns="0" bIns="0">
+          <a:bodyPr wrap="square" lIns="0" tIns="0" rIns="0" bIns="0" anchor="t">
             <a:spAutoFit/>
           </a:bodyPr>
           <a:lstStyle/>
@@ -11174,7 +10859,7 @@
           <a:noFill/>
         </p:spPr>
         <p:txBody>
-          <a:bodyPr wrap="square" anchor="t" lIns="0" rIns="0" tIns="0" bIns="0">
+          <a:bodyPr wrap="square" lIns="0" tIns="0" rIns="0" bIns="0" anchor="t">
             <a:spAutoFit/>
           </a:bodyPr>
           <a:lstStyle/>
@@ -11375,6 +11060,7 @@
           <a:lstStyle/>
           <a:p>
             <a:pPr algn="ctr"/>
+            <a:endParaRPr/>
           </a:p>
         </p:txBody>
       </p:sp>
@@ -11395,7 +11081,7 @@
           <a:noFill/>
         </p:spPr>
         <p:txBody>
-          <a:bodyPr wrap="square" anchor="t" lIns="0" rIns="0" tIns="0" bIns="0">
+          <a:bodyPr wrap="square" lIns="0" tIns="0" rIns="0" bIns="0" anchor="t">
             <a:spAutoFit/>
           </a:bodyPr>
           <a:lstStyle/>
@@ -11437,7 +11123,7 @@
           <a:noFill/>
         </p:spPr>
         <p:txBody>
-          <a:bodyPr wrap="square" anchor="t" lIns="0" rIns="0" tIns="0" bIns="0">
+          <a:bodyPr wrap="square" lIns="0" tIns="0" rIns="0" bIns="0" anchor="t">
             <a:spAutoFit/>
           </a:bodyPr>
           <a:lstStyle/>
@@ -11639,6 +11325,7 @@
           <a:lstStyle/>
           <a:p>
             <a:pPr algn="ctr"/>
+            <a:endParaRPr/>
           </a:p>
         </p:txBody>
       </p:sp>
@@ -11659,7 +11346,7 @@
           <a:noFill/>
         </p:spPr>
         <p:txBody>
-          <a:bodyPr wrap="square" anchor="t" lIns="0" rIns="0" tIns="0" bIns="0">
+          <a:bodyPr wrap="square" lIns="0" tIns="0" rIns="0" bIns="0" anchor="t">
             <a:spAutoFit/>
           </a:bodyPr>
           <a:lstStyle/>
@@ -11701,7 +11388,7 @@
           <a:noFill/>
         </p:spPr>
         <p:txBody>
-          <a:bodyPr wrap="square" anchor="t" lIns="0" rIns="0" tIns="0" bIns="0">
+          <a:bodyPr wrap="square" lIns="0" tIns="0" rIns="0" bIns="0" anchor="t">
             <a:spAutoFit/>
           </a:bodyPr>
           <a:lstStyle/>
